--- a/demo/pptx/pitch-deck.pptx
+++ b/demo/pptx/pitch-deck.pptx
@@ -1453,7 +1453,7 @@
         </p:nvSpPr>
         <p:spPr>
           <a:xfrm>
-            <a:off x="548640" y="777240"/>
+            <a:off x="548640" y="804672"/>
             <a:ext cx="6858000" cy="0"/>
           </a:xfrm>
           <a:prstGeom prst="rect">
@@ -1475,7 +1475,7 @@
                   <a:srgbClr val="FFE05E"/>
                 </a:solidFill>
               </a:rPr>
-              <a:t>PITCH DECK</a:t>
+              <a:t>PITCH DECK · HERBST 2026</a:t>
             </a:r>
             <a:endParaRPr lang="en-US" sz="1000" dirty="0"/>
           </a:p>
@@ -1483,39 +1483,23 @@
       </p:sp>
       <p:sp>
         <p:nvSpPr>
-          <p:cNvPr id="4" name="Text 2"/>
+          <p:cNvPr id="4" name="Shape 2"/>
           <p:cNvSpPr/>
           <p:nvPr/>
         </p:nvSpPr>
         <p:spPr>
           <a:xfrm>
-            <a:off x="548640" y="1828800"/>
-            <a:ext cx="7772400" cy="0"/>
-          </a:xfrm>
-          <a:prstGeom prst="rect">
-            <a:avLst/>
-          </a:prstGeom>
-          <a:noFill/>
+            <a:off x="566928" y="1691640"/>
+            <a:ext cx="1280160" cy="64008"/>
+          </a:xfrm>
+          <a:prstGeom prst="rect">
+            <a:avLst/>
+          </a:prstGeom>
+          <a:solidFill>
+            <a:srgbClr val="FFE05E"/>
+          </a:solidFill>
           <a:ln/>
         </p:spPr>
-        <p:txBody>
-          <a:bodyPr wrap="square" rtlCol="0" anchor="ctr"/>
-          <a:lstStyle/>
-          <a:p>
-            <a:pPr indent="0" marL="0">
-              <a:buNone/>
-            </a:pPr>
-            <a:r>
-              <a:rPr lang="en-US" sz="4000" dirty="0">
-                <a:solidFill>
-                  <a:srgbClr val="FCFCFC"/>
-                </a:solidFill>
-              </a:rPr>
-              <a:t>Herbst-Kampagne 2026 — Mustermarke</a:t>
-            </a:r>
-            <a:endParaRPr lang="en-US" sz="4000" dirty="0"/>
-          </a:p>
-        </p:txBody>
       </p:sp>
       <p:sp>
         <p:nvSpPr>
@@ -1525,8 +1509,8 @@
         </p:nvSpPr>
         <p:spPr>
           <a:xfrm>
-            <a:off x="548640" y="4023360"/>
-            <a:ext cx="6858000" cy="0"/>
+            <a:off x="548640" y="1874520"/>
+            <a:ext cx="7863840" cy="0"/>
           </a:xfrm>
           <a:prstGeom prst="rect">
             <a:avLst/>
@@ -1542,14 +1526,86 @@
               <a:buNone/>
             </a:pPr>
             <a:r>
-              <a:rPr lang="en-US" sz="1200" dirty="0">
+              <a:rPr lang="en-US" sz="3800" b="1" dirty="0">
+                <a:solidFill>
+                  <a:srgbClr val="FCFCFC"/>
+                </a:solidFill>
+              </a:rPr>
+              <a:t>Herbst-Kampagne 2026 — Mustermarke</a:t>
+            </a:r>
+            <a:endParaRPr lang="en-US" sz="3800" dirty="0"/>
+          </a:p>
+        </p:txBody>
+      </p:sp>
+      <p:sp>
+        <p:nvSpPr>
+          <p:cNvPr id="6" name="Text 4"/>
+          <p:cNvSpPr/>
+          <p:nvPr/>
+        </p:nvSpPr>
+        <p:spPr>
+          <a:xfrm>
+            <a:off x="548640" y="3154680"/>
+            <a:ext cx="6858000" cy="0"/>
+          </a:xfrm>
+          <a:prstGeom prst="rect">
+            <a:avLst/>
+          </a:prstGeom>
+          <a:noFill/>
+          <a:ln/>
+        </p:spPr>
+        <p:txBody>
+          <a:bodyPr wrap="square" rtlCol="0" anchor="ctr"/>
+          <a:lstStyle/>
+          <a:p>
+            <a:pPr indent="0" marL="0">
+              <a:buNone/>
+            </a:pPr>
+            <a:r>
+              <a:rPr lang="en-US" sz="1400" dirty="0">
+                <a:solidFill>
+                  <a:srgbClr val="C9C8BE"/>
+                </a:solidFill>
+              </a:rPr>
+              <a:t>Mediastrategie &amp; Kreation — pilot Hamburg · Kick-off KW 34</a:t>
+            </a:r>
+            <a:endParaRPr lang="en-US" sz="1400" dirty="0"/>
+          </a:p>
+        </p:txBody>
+      </p:sp>
+      <p:sp>
+        <p:nvSpPr>
+          <p:cNvPr id="7" name="Text 5"/>
+          <p:cNvSpPr/>
+          <p:nvPr/>
+        </p:nvSpPr>
+        <p:spPr>
+          <a:xfrm>
+            <a:off x="548640" y="4480560"/>
+            <a:ext cx="6858000" cy="0"/>
+          </a:xfrm>
+          <a:prstGeom prst="rect">
+            <a:avLst/>
+          </a:prstGeom>
+          <a:noFill/>
+          <a:ln/>
+        </p:spPr>
+        <p:txBody>
+          <a:bodyPr wrap="square" rtlCol="0" anchor="ctr"/>
+          <a:lstStyle/>
+          <a:p>
+            <a:pPr indent="0" marL="0">
+              <a:buNone/>
+            </a:pPr>
+            <a:r>
+              <a:rPr lang="en-US" sz="1100" dirty="0">
                 <a:solidFill>
                   <a:srgbClr val="8A897F"/>
                 </a:solidFill>
               </a:rPr>
               <a:t>Erzeugt mit dem Skill pptx aus konzept.md</a:t>
             </a:r>
-            <a:endParaRPr lang="en-US" sz="1200" dirty="0"/>
+            <a:endParaRPr lang="en-US" sz="1100" dirty="0"/>
           </a:p>
         </p:txBody>
       </p:sp>
@@ -1613,8 +1669,8 @@
         </p:nvSpPr>
         <p:spPr>
           <a:xfrm>
-            <a:off x="8046720" y="320040"/>
-            <a:ext cx="6858000" cy="0"/>
+            <a:off x="7818120" y="320040"/>
+            <a:ext cx="1005840" cy="0"/>
           </a:xfrm>
           <a:prstGeom prst="rect">
             <a:avLst/>
@@ -1626,7 +1682,7 @@
           <a:bodyPr wrap="square" rtlCol="0" anchor="ctr"/>
           <a:lstStyle/>
           <a:p>
-            <a:pPr indent="0" marL="0">
+            <a:pPr algn="r" indent="0" marL="0">
               <a:buNone/>
             </a:pPr>
             <a:r>
@@ -1635,7 +1691,7 @@
                   <a:srgbClr val="8A897F"/>
                 </a:solidFill>
               </a:rPr>
-              <a:t>01</a:t>
+              <a:t>01 / 06</a:t>
             </a:r>
             <a:endParaRPr lang="en-US" sz="1100" dirty="0"/>
           </a:p>
@@ -1649,8 +1705,8 @@
         </p:nvSpPr>
         <p:spPr>
           <a:xfrm>
-            <a:off x="548640" y="457200"/>
-            <a:ext cx="7315200" cy="0"/>
+            <a:off x="548640" y="384048"/>
+            <a:ext cx="6858000" cy="0"/>
           </a:xfrm>
           <a:prstGeom prst="rect">
             <a:avLst/>
@@ -1666,14 +1722,14 @@
               <a:buNone/>
             </a:pPr>
             <a:r>
-              <a:rPr lang="en-US" sz="2800" b="1" dirty="0">
-                <a:solidFill>
-                  <a:srgbClr val="262626"/>
-                </a:solidFill>
-              </a:rPr>
-              <a:t>Die unbequeme Wahrheit</a:t>
-            </a:r>
-            <a:endParaRPr lang="en-US" sz="2800" dirty="0"/>
+              <a:rPr lang="en-US" sz="950" spc="250" kern="0" dirty="0">
+                <a:solidFill>
+                  <a:srgbClr val="8A897F"/>
+                </a:solidFill>
+              </a:rPr>
+              <a:t>PILOT · MUSTERMARKE</a:t>
+            </a:r>
+            <a:endParaRPr lang="en-US" sz="950" dirty="0"/>
           </a:p>
         </p:txBody>
       </p:sp>
@@ -1685,8 +1741,8 @@
         </p:nvSpPr>
         <p:spPr>
           <a:xfrm>
-            <a:off x="640080" y="1371600"/>
-            <a:ext cx="7498080" cy="3108960"/>
+            <a:off x="548640" y="713232"/>
+            <a:ext cx="7315200" cy="0"/>
           </a:xfrm>
           <a:prstGeom prst="rect">
             <a:avLst/>
@@ -1698,58 +1754,108 @@
           <a:bodyPr wrap="square" rtlCol="0" anchor="ctr"/>
           <a:lstStyle/>
           <a:p>
-            <a:pPr marL="342900" indent="-342900">
-              <a:lnSpc>
-                <a:spcPct val="130000"/>
+            <a:pPr indent="0" marL="0">
+              <a:buNone/>
+            </a:pPr>
+            <a:r>
+              <a:rPr lang="en-US" sz="2800" b="1" dirty="0">
+                <a:solidFill>
+                  <a:srgbClr val="262626"/>
+                </a:solidFill>
+              </a:rPr>
+              <a:t>Die unbequeme Wahrheit</a:t>
+            </a:r>
+            <a:endParaRPr lang="en-US" sz="2800" dirty="0"/>
+          </a:p>
+        </p:txBody>
+      </p:sp>
+      <p:sp>
+        <p:nvSpPr>
+          <p:cNvPr id="6" name="Text 4"/>
+          <p:cNvSpPr/>
+          <p:nvPr/>
+        </p:nvSpPr>
+        <p:spPr>
+          <a:xfrm>
+            <a:off x="640080" y="1645920"/>
+            <a:ext cx="7680960" cy="2926080"/>
+          </a:xfrm>
+          <a:prstGeom prst="rect">
+            <a:avLst/>
+          </a:prstGeom>
+          <a:noFill/>
+          <a:ln/>
+        </p:spPr>
+        <p:txBody>
+          <a:bodyPr wrap="square" rtlCol="0" anchor="ctr"/>
+          <a:lstStyle/>
+          <a:p>
+            <a:pPr marL="177800" indent="-177800">
+              <a:lnSpc>
+                <a:spcPct val="135000"/>
               </a:lnSpc>
               <a:buSzPct val="100000"/>
               <a:buChar char="•"/>
             </a:pPr>
             <a:r>
-              <a:rPr lang="en-US" sz="1600" dirty="0">
+              <a:rPr lang="en-US" sz="1700" b="1" dirty="0">
+                <a:solidFill>
+                  <a:srgbClr val="262626"/>
+                </a:solidFill>
+              </a:rPr>
+              <a:t>68 %</a:t>
+            </a:r>
+            <a:pPr indent="0" marL="0">
+              <a:lnSpc>
+                <a:spcPct val="135000"/>
+              </a:lnSpc>
+              <a:buNone/>
+            </a:pPr>
+            <a:r>
+              <a:rPr lang="en-US" sz="1700" dirty="0">
                 <a:solidFill>
                   <a:srgbClr val="3A3A36"/>
                 </a:solidFill>
               </a:rPr>
-              <a:t>68 % der Herbst-Kampagnen im Segment sehen austauschbar aus</a:t>
-            </a:r>
-            <a:endParaRPr lang="en-US" sz="1600" dirty="0"/>
-          </a:p>
-          <a:p>
-            <a:pPr marL="342900" indent="-342900">
-              <a:lnSpc>
-                <a:spcPct val="130000"/>
+              <a:t> der Herbst-Kampagnen im Segment sehen austauschbar aus</a:t>
+            </a:r>
+            <a:endParaRPr lang="en-US" sz="1700" dirty="0"/>
+          </a:p>
+          <a:p>
+            <a:pPr marL="177800" indent="-177800">
+              <a:lnSpc>
+                <a:spcPct val="135000"/>
               </a:lnSpc>
               <a:buSzPct val="100000"/>
               <a:buChar char="•"/>
             </a:pPr>
             <a:r>
-              <a:rPr lang="en-US" sz="1600" dirty="0">
+              <a:rPr lang="en-US" sz="1700" dirty="0">
                 <a:solidFill>
                   <a:srgbClr val="3A3A36"/>
                 </a:solidFill>
               </a:rPr>
               <a:t>Preisrabatt ist der einzige Hebel, den fast alle ziehen</a:t>
             </a:r>
-            <a:endParaRPr lang="en-US" sz="1600" dirty="0"/>
-          </a:p>
-          <a:p>
-            <a:pPr marL="342900" indent="-342900">
-              <a:lnSpc>
-                <a:spcPct val="130000"/>
+            <a:endParaRPr lang="en-US" sz="1700" dirty="0"/>
+          </a:p>
+          <a:p>
+            <a:pPr marL="177800" indent="-177800">
+              <a:lnSpc>
+                <a:spcPct val="135000"/>
               </a:lnSpc>
               <a:buSzPct val="100000"/>
               <a:buChar char="•"/>
             </a:pPr>
             <a:r>
-              <a:rPr lang="en-US" sz="1600" dirty="0">
+              <a:rPr lang="en-US" sz="1700" dirty="0">
                 <a:solidFill>
                   <a:srgbClr val="3A3A36"/>
                 </a:solidFill>
               </a:rPr>
               <a:t>Die Zielgruppe erinnert sich an keine einzige Marke</a:t>
             </a:r>
-            <a:endParaRPr lang="en-US" sz="1600" dirty="0"/>
+            <a:endParaRPr lang="en-US" sz="1700" dirty="0"/>
           </a:p>
         </p:txBody>
       </p:sp>
@@ -1813,8 +1919,8 @@
         </p:nvSpPr>
         <p:spPr>
           <a:xfrm>
-            <a:off x="8046720" y="320040"/>
-            <a:ext cx="6858000" cy="0"/>
+            <a:off x="7818120" y="320040"/>
+            <a:ext cx="1005840" cy="0"/>
           </a:xfrm>
           <a:prstGeom prst="rect">
             <a:avLst/>
@@ -1826,7 +1932,7 @@
           <a:bodyPr wrap="square" rtlCol="0" anchor="ctr"/>
           <a:lstStyle/>
           <a:p>
-            <a:pPr indent="0" marL="0">
+            <a:pPr algn="r" indent="0" marL="0">
               <a:buNone/>
             </a:pPr>
             <a:r>
@@ -1835,7 +1941,7 @@
                   <a:srgbClr val="8A897F"/>
                 </a:solidFill>
               </a:rPr>
-              <a:t>02</a:t>
+              <a:t>02 / 06</a:t>
             </a:r>
             <a:endParaRPr lang="en-US" sz="1100" dirty="0"/>
           </a:p>
@@ -1849,8 +1955,8 @@
         </p:nvSpPr>
         <p:spPr>
           <a:xfrm>
-            <a:off x="548640" y="457200"/>
-            <a:ext cx="7315200" cy="0"/>
+            <a:off x="548640" y="384048"/>
+            <a:ext cx="6858000" cy="0"/>
           </a:xfrm>
           <a:prstGeom prst="rect">
             <a:avLst/>
@@ -1866,14 +1972,14 @@
               <a:buNone/>
             </a:pPr>
             <a:r>
-              <a:rPr lang="en-US" sz="2800" b="1" dirty="0">
-                <a:solidFill>
-                  <a:srgbClr val="262626"/>
-                </a:solidFill>
-              </a:rPr>
-              <a:t>Das Problem in Zahlen</a:t>
-            </a:r>
-            <a:endParaRPr lang="en-US" sz="2800" dirty="0"/>
+              <a:rPr lang="en-US" sz="950" spc="250" kern="0" dirty="0">
+                <a:solidFill>
+                  <a:srgbClr val="8A897F"/>
+                </a:solidFill>
+              </a:rPr>
+              <a:t>PILOT · MUSTERMARKE</a:t>
+            </a:r>
+            <a:endParaRPr lang="en-US" sz="950" dirty="0"/>
           </a:p>
         </p:txBody>
       </p:sp>
@@ -1885,8 +1991,8 @@
         </p:nvSpPr>
         <p:spPr>
           <a:xfrm>
-            <a:off x="640080" y="1371600"/>
-            <a:ext cx="7498080" cy="3108960"/>
+            <a:off x="548640" y="713232"/>
+            <a:ext cx="7315200" cy="0"/>
           </a:xfrm>
           <a:prstGeom prst="rect">
             <a:avLst/>
@@ -1898,58 +2004,164 @@
           <a:bodyPr wrap="square" rtlCol="0" anchor="ctr"/>
           <a:lstStyle/>
           <a:p>
-            <a:pPr marL="342900" indent="-342900">
-              <a:lnSpc>
-                <a:spcPct val="130000"/>
+            <a:pPr indent="0" marL="0">
+              <a:buNone/>
+            </a:pPr>
+            <a:r>
+              <a:rPr lang="en-US" sz="2800" b="1" dirty="0">
+                <a:solidFill>
+                  <a:srgbClr val="262626"/>
+                </a:solidFill>
+              </a:rPr>
+              <a:t>Das Problem in Zahlen</a:t>
+            </a:r>
+            <a:endParaRPr lang="en-US" sz="2800" dirty="0"/>
+          </a:p>
+        </p:txBody>
+      </p:sp>
+      <p:sp>
+        <p:nvSpPr>
+          <p:cNvPr id="6" name="Text 4"/>
+          <p:cNvSpPr/>
+          <p:nvPr/>
+        </p:nvSpPr>
+        <p:spPr>
+          <a:xfrm>
+            <a:off x="640080" y="1645920"/>
+            <a:ext cx="7680960" cy="2926080"/>
+          </a:xfrm>
+          <a:prstGeom prst="rect">
+            <a:avLst/>
+          </a:prstGeom>
+          <a:noFill/>
+          <a:ln/>
+        </p:spPr>
+        <p:txBody>
+          <a:bodyPr wrap="square" rtlCol="0" anchor="ctr"/>
+          <a:lstStyle/>
+          <a:p>
+            <a:pPr marL="177800" indent="-177800">
+              <a:lnSpc>
+                <a:spcPct val="135000"/>
               </a:lnSpc>
               <a:buSzPct val="100000"/>
               <a:buChar char="•"/>
             </a:pPr>
             <a:r>
-              <a:rPr lang="en-US" sz="1600" dirty="0">
+              <a:rPr lang="en-US" sz="1700" dirty="0">
                 <a:solidFill>
                   <a:srgbClr val="3A3A36"/>
                 </a:solidFill>
               </a:rPr>
-              <a:t>Ø Erinnerungswert der Kategorie: 11 %</a:t>
-            </a:r>
-            <a:endParaRPr lang="en-US" sz="1600" dirty="0"/>
-          </a:p>
-          <a:p>
-            <a:pPr marL="342900" indent="-342900">
-              <a:lnSpc>
-                <a:spcPct val="130000"/>
+              <a:t>Ø Erinnerungswert der Kategorie: </a:t>
+            </a:r>
+            <a:pPr indent="0" marL="0">
+              <a:lnSpc>
+                <a:spcPct val="135000"/>
+              </a:lnSpc>
+              <a:buNone/>
+            </a:pPr>
+            <a:r>
+              <a:rPr lang="en-US" sz="1700" b="1" dirty="0">
+                <a:solidFill>
+                  <a:srgbClr val="262626"/>
+                </a:solidFill>
+              </a:rPr>
+              <a:t>11 %</a:t>
+            </a:r>
+            <a:endParaRPr lang="en-US" sz="1700" dirty="0"/>
+          </a:p>
+          <a:p>
+            <a:pPr marL="177800" indent="-177800">
+              <a:lnSpc>
+                <a:spcPct val="135000"/>
               </a:lnSpc>
               <a:buSzPct val="100000"/>
               <a:buChar char="•"/>
             </a:pPr>
             <a:r>
-              <a:rPr lang="en-US" sz="1600" dirty="0">
+              <a:rPr lang="en-US" sz="1700" dirty="0">
                 <a:solidFill>
                   <a:srgbClr val="3A3A36"/>
                 </a:solidFill>
               </a:rPr>
-              <a:t>Streuverlust bei reiner Preis-Kommunikation: 34 %</a:t>
-            </a:r>
-            <a:endParaRPr lang="en-US" sz="1600" dirty="0"/>
-          </a:p>
-          <a:p>
-            <a:pPr marL="342900" indent="-342900">
-              <a:lnSpc>
-                <a:spcPct val="130000"/>
+              <a:t>Streuverlust bei reiner Preis-Kommunikation: </a:t>
+            </a:r>
+            <a:pPr indent="0" marL="0">
+              <a:lnSpc>
+                <a:spcPct val="135000"/>
+              </a:lnSpc>
+              <a:buNone/>
+            </a:pPr>
+            <a:r>
+              <a:rPr lang="en-US" sz="1700" b="1" dirty="0">
+                <a:solidFill>
+                  <a:srgbClr val="262626"/>
+                </a:solidFill>
+              </a:rPr>
+              <a:t>34 %</a:t>
+            </a:r>
+            <a:endParaRPr lang="en-US" sz="1700" dirty="0"/>
+          </a:p>
+          <a:p>
+            <a:pPr marL="177800" indent="-177800">
+              <a:lnSpc>
+                <a:spcPct val="135000"/>
               </a:lnSpc>
               <a:buSzPct val="100000"/>
               <a:buChar char="•"/>
             </a:pPr>
             <a:r>
-              <a:rPr lang="en-US" sz="1600" dirty="0">
+              <a:rPr lang="en-US" sz="1700" dirty="0">
                 <a:solidFill>
                   <a:srgbClr val="3A3A36"/>
                 </a:solidFill>
               </a:rPr>
-              <a:t>Kosten pro erinnerter Kontakt steigen seit 2024 um 22 %</a:t>
-            </a:r>
-            <a:endParaRPr lang="en-US" sz="1600" dirty="0"/>
+              <a:t>Kosten pro erinnerter Kontakt steigen seit </a:t>
+            </a:r>
+            <a:pPr indent="0" marL="0">
+              <a:lnSpc>
+                <a:spcPct val="135000"/>
+              </a:lnSpc>
+              <a:buNone/>
+            </a:pPr>
+            <a:r>
+              <a:rPr lang="en-US" sz="1700" b="1" dirty="0">
+                <a:solidFill>
+                  <a:srgbClr val="262626"/>
+                </a:solidFill>
+              </a:rPr>
+              <a:t>2024 </a:t>
+            </a:r>
+            <a:pPr indent="0" marL="0">
+              <a:lnSpc>
+                <a:spcPct val="135000"/>
+              </a:lnSpc>
+              <a:buNone/>
+            </a:pPr>
+            <a:r>
+              <a:rPr lang="en-US" sz="1700" dirty="0">
+                <a:solidFill>
+                  <a:srgbClr val="3A3A36"/>
+                </a:solidFill>
+              </a:rPr>
+              <a:t>um </a:t>
+            </a:r>
+            <a:pPr indent="0" marL="0">
+              <a:lnSpc>
+                <a:spcPct val="135000"/>
+              </a:lnSpc>
+              <a:buNone/>
+            </a:pPr>
+            <a:r>
+              <a:rPr lang="en-US" sz="1700" b="1" dirty="0">
+                <a:solidFill>
+                  <a:srgbClr val="262626"/>
+                </a:solidFill>
+              </a:rPr>
+              <a:t>22 %</a:t>
+            </a:r>
+            <a:endParaRPr lang="en-US" sz="1700" dirty="0"/>
           </a:p>
         </p:txBody>
       </p:sp>
@@ -2013,8 +2225,8 @@
         </p:nvSpPr>
         <p:spPr>
           <a:xfrm>
-            <a:off x="8046720" y="320040"/>
-            <a:ext cx="6858000" cy="0"/>
+            <a:off x="7818120" y="320040"/>
+            <a:ext cx="1005840" cy="0"/>
           </a:xfrm>
           <a:prstGeom prst="rect">
             <a:avLst/>
@@ -2026,7 +2238,7 @@
           <a:bodyPr wrap="square" rtlCol="0" anchor="ctr"/>
           <a:lstStyle/>
           <a:p>
-            <a:pPr indent="0" marL="0">
+            <a:pPr algn="r" indent="0" marL="0">
               <a:buNone/>
             </a:pPr>
             <a:r>
@@ -2035,7 +2247,7 @@
                   <a:srgbClr val="8A897F"/>
                 </a:solidFill>
               </a:rPr>
-              <a:t>03</a:t>
+              <a:t>03 / 06</a:t>
             </a:r>
             <a:endParaRPr lang="en-US" sz="1100" dirty="0"/>
           </a:p>
@@ -2049,8 +2261,8 @@
         </p:nvSpPr>
         <p:spPr>
           <a:xfrm>
-            <a:off x="548640" y="457200"/>
-            <a:ext cx="7315200" cy="0"/>
+            <a:off x="548640" y="384048"/>
+            <a:ext cx="6858000" cy="0"/>
           </a:xfrm>
           <a:prstGeom prst="rect">
             <a:avLst/>
@@ -2066,14 +2278,14 @@
               <a:buNone/>
             </a:pPr>
             <a:r>
-              <a:rPr lang="en-US" sz="2800" b="1" dirty="0">
-                <a:solidFill>
-                  <a:srgbClr val="262626"/>
-                </a:solidFill>
-              </a:rPr>
-              <a:t>Unser Ansatz</a:t>
-            </a:r>
-            <a:endParaRPr lang="en-US" sz="2800" dirty="0"/>
+              <a:rPr lang="en-US" sz="950" spc="250" kern="0" dirty="0">
+                <a:solidFill>
+                  <a:srgbClr val="8A897F"/>
+                </a:solidFill>
+              </a:rPr>
+              <a:t>PILOT · MUSTERMARKE</a:t>
+            </a:r>
+            <a:endParaRPr lang="en-US" sz="950" dirty="0"/>
           </a:p>
         </p:txBody>
       </p:sp>
@@ -2085,8 +2297,8 @@
         </p:nvSpPr>
         <p:spPr>
           <a:xfrm>
-            <a:off x="640080" y="1371600"/>
-            <a:ext cx="7498080" cy="3108960"/>
+            <a:off x="548640" y="713232"/>
+            <a:ext cx="7315200" cy="0"/>
           </a:xfrm>
           <a:prstGeom prst="rect">
             <a:avLst/>
@@ -2098,58 +2310,94 @@
           <a:bodyPr wrap="square" rtlCol="0" anchor="ctr"/>
           <a:lstStyle/>
           <a:p>
-            <a:pPr marL="342900" indent="-342900">
-              <a:lnSpc>
-                <a:spcPct val="130000"/>
+            <a:pPr indent="0" marL="0">
+              <a:buNone/>
+            </a:pPr>
+            <a:r>
+              <a:rPr lang="en-US" sz="2800" b="1" dirty="0">
+                <a:solidFill>
+                  <a:srgbClr val="262626"/>
+                </a:solidFill>
+              </a:rPr>
+              <a:t>Unser Ansatz</a:t>
+            </a:r>
+            <a:endParaRPr lang="en-US" sz="2800" dirty="0"/>
+          </a:p>
+        </p:txBody>
+      </p:sp>
+      <p:sp>
+        <p:nvSpPr>
+          <p:cNvPr id="6" name="Text 4"/>
+          <p:cNvSpPr/>
+          <p:nvPr/>
+        </p:nvSpPr>
+        <p:spPr>
+          <a:xfrm>
+            <a:off x="640080" y="1645920"/>
+            <a:ext cx="7680960" cy="2926080"/>
+          </a:xfrm>
+          <a:prstGeom prst="rect">
+            <a:avLst/>
+          </a:prstGeom>
+          <a:noFill/>
+          <a:ln/>
+        </p:spPr>
+        <p:txBody>
+          <a:bodyPr wrap="square" rtlCol="0" anchor="ctr"/>
+          <a:lstStyle/>
+          <a:p>
+            <a:pPr marL="177800" indent="-177800">
+              <a:lnSpc>
+                <a:spcPct val="135000"/>
               </a:lnSpc>
               <a:buSzPct val="100000"/>
               <a:buChar char="•"/>
             </a:pPr>
             <a:r>
-              <a:rPr lang="en-US" sz="1600" dirty="0">
+              <a:rPr lang="en-US" sz="1700" dirty="0">
                 <a:solidFill>
                   <a:srgbClr val="3A3A36"/>
                 </a:solidFill>
               </a:rPr>
               <a:t>Eine Botschaft, konsequent über alle Kanäle</a:t>
             </a:r>
-            <a:endParaRPr lang="en-US" sz="1600" dirty="0"/>
-          </a:p>
-          <a:p>
-            <a:pPr marL="342900" indent="-342900">
-              <a:lnSpc>
-                <a:spcPct val="130000"/>
+            <a:endParaRPr lang="en-US" sz="1700" dirty="0"/>
+          </a:p>
+          <a:p>
+            <a:pPr marL="177800" indent="-177800">
+              <a:lnSpc>
+                <a:spcPct val="135000"/>
               </a:lnSpc>
               <a:buSzPct val="100000"/>
               <a:buChar char="•"/>
             </a:pPr>
             <a:r>
-              <a:rPr lang="en-US" sz="1600" dirty="0">
+              <a:rPr lang="en-US" sz="1700" dirty="0">
                 <a:solidFill>
                   <a:srgbClr val="3A3A36"/>
                 </a:solidFill>
               </a:rPr>
               <a:t>Real People statt Models — Glaubwürdigkeit vor Hochglanz</a:t>
             </a:r>
-            <a:endParaRPr lang="en-US" sz="1600" dirty="0"/>
-          </a:p>
-          <a:p>
-            <a:pPr marL="342900" indent="-342900">
-              <a:lnSpc>
-                <a:spcPct val="130000"/>
+            <a:endParaRPr lang="en-US" sz="1700" dirty="0"/>
+          </a:p>
+          <a:p>
+            <a:pPr marL="177800" indent="-177800">
+              <a:lnSpc>
+                <a:spcPct val="135000"/>
               </a:lnSpc>
               <a:buSzPct val="100000"/>
               <a:buChar char="•"/>
             </a:pPr>
             <a:r>
-              <a:rPr lang="en-US" sz="1600" dirty="0">
+              <a:rPr lang="en-US" sz="1700" dirty="0">
                 <a:solidFill>
                   <a:srgbClr val="3A3A36"/>
                 </a:solidFill>
               </a:rPr>
               <a:t>Kein Preis im Hero, Preis erst in der Conversion-Stufe</a:t>
             </a:r>
-            <a:endParaRPr lang="en-US" sz="1600" dirty="0"/>
+            <a:endParaRPr lang="en-US" sz="1700" dirty="0"/>
           </a:p>
         </p:txBody>
       </p:sp>
@@ -2213,8 +2461,8 @@
         </p:nvSpPr>
         <p:spPr>
           <a:xfrm>
-            <a:off x="8046720" y="320040"/>
-            <a:ext cx="6858000" cy="0"/>
+            <a:off x="7818120" y="320040"/>
+            <a:ext cx="1005840" cy="0"/>
           </a:xfrm>
           <a:prstGeom prst="rect">
             <a:avLst/>
@@ -2226,7 +2474,7 @@
           <a:bodyPr wrap="square" rtlCol="0" anchor="ctr"/>
           <a:lstStyle/>
           <a:p>
-            <a:pPr indent="0" marL="0">
+            <a:pPr algn="r" indent="0" marL="0">
               <a:buNone/>
             </a:pPr>
             <a:r>
@@ -2235,7 +2483,7 @@
                   <a:srgbClr val="8A897F"/>
                 </a:solidFill>
               </a:rPr>
-              <a:t>04</a:t>
+              <a:t>04 / 06</a:t>
             </a:r>
             <a:endParaRPr lang="en-US" sz="1100" dirty="0"/>
           </a:p>
@@ -2249,8 +2497,8 @@
         </p:nvSpPr>
         <p:spPr>
           <a:xfrm>
-            <a:off x="548640" y="457200"/>
-            <a:ext cx="7315200" cy="0"/>
+            <a:off x="548640" y="384048"/>
+            <a:ext cx="6858000" cy="0"/>
           </a:xfrm>
           <a:prstGeom prst="rect">
             <a:avLst/>
@@ -2266,14 +2514,14 @@
               <a:buNone/>
             </a:pPr>
             <a:r>
-              <a:rPr lang="en-US" sz="2800" b="1" dirty="0">
-                <a:solidFill>
-                  <a:srgbClr val="262626"/>
-                </a:solidFill>
-              </a:rPr>
-              <a:t>Der Beweis</a:t>
-            </a:r>
-            <a:endParaRPr lang="en-US" sz="2800" dirty="0"/>
+              <a:rPr lang="en-US" sz="950" spc="250" kern="0" dirty="0">
+                <a:solidFill>
+                  <a:srgbClr val="8A897F"/>
+                </a:solidFill>
+              </a:rPr>
+              <a:t>PILOT · MUSTERMARKE</a:t>
+            </a:r>
+            <a:endParaRPr lang="en-US" sz="950" dirty="0"/>
           </a:p>
         </p:txBody>
       </p:sp>
@@ -2285,8 +2533,8 @@
         </p:nvSpPr>
         <p:spPr>
           <a:xfrm>
-            <a:off x="640080" y="1371600"/>
-            <a:ext cx="7498080" cy="3108960"/>
+            <a:off x="548640" y="713232"/>
+            <a:ext cx="7315200" cy="0"/>
           </a:xfrm>
           <a:prstGeom prst="rect">
             <a:avLst/>
@@ -2298,58 +2546,234 @@
           <a:bodyPr wrap="square" rtlCol="0" anchor="ctr"/>
           <a:lstStyle/>
           <a:p>
-            <a:pPr marL="342900" indent="-342900">
-              <a:lnSpc>
-                <a:spcPct val="130000"/>
+            <a:pPr indent="0" marL="0">
+              <a:buNone/>
+            </a:pPr>
+            <a:r>
+              <a:rPr lang="en-US" sz="2800" b="1" dirty="0">
+                <a:solidFill>
+                  <a:srgbClr val="262626"/>
+                </a:solidFill>
+              </a:rPr>
+              <a:t>Der Beweis</a:t>
+            </a:r>
+            <a:endParaRPr lang="en-US" sz="2800" dirty="0"/>
+          </a:p>
+        </p:txBody>
+      </p:sp>
+      <p:sp>
+        <p:nvSpPr>
+          <p:cNvPr id="6" name="Text 4"/>
+          <p:cNvSpPr/>
+          <p:nvPr/>
+        </p:nvSpPr>
+        <p:spPr>
+          <a:xfrm>
+            <a:off x="640080" y="1645920"/>
+            <a:ext cx="7680960" cy="2926080"/>
+          </a:xfrm>
+          <a:prstGeom prst="rect">
+            <a:avLst/>
+          </a:prstGeom>
+          <a:noFill/>
+          <a:ln/>
+        </p:spPr>
+        <p:txBody>
+          <a:bodyPr wrap="square" rtlCol="0" anchor="ctr"/>
+          <a:lstStyle/>
+          <a:p>
+            <a:pPr marL="177800" indent="-177800">
+              <a:lnSpc>
+                <a:spcPct val="135000"/>
               </a:lnSpc>
               <a:buSzPct val="100000"/>
               <a:buChar char="•"/>
             </a:pPr>
             <a:r>
-              <a:rPr lang="en-US" sz="1600" dirty="0">
+              <a:rPr lang="en-US" sz="1700" dirty="0">
                 <a:solidFill>
                   <a:srgbClr val="3A3A36"/>
                 </a:solidFill>
               </a:rPr>
-              <a:t>Case „Frühjahr 2026": +34 % CTR nach Creative-Refresh</a:t>
-            </a:r>
-            <a:endParaRPr lang="en-US" sz="1600" dirty="0"/>
-          </a:p>
-          <a:p>
-            <a:pPr marL="342900" indent="-342900">
-              <a:lnSpc>
-                <a:spcPct val="130000"/>
+              <a:t>Case „Frühjahr </a:t>
+            </a:r>
+            <a:pPr indent="0" marL="0">
+              <a:lnSpc>
+                <a:spcPct val="135000"/>
+              </a:lnSpc>
+              <a:buNone/>
+            </a:pPr>
+            <a:r>
+              <a:rPr lang="en-US" sz="1700" b="1" dirty="0">
+                <a:solidFill>
+                  <a:srgbClr val="262626"/>
+                </a:solidFill>
+              </a:rPr>
+              <a:t>2026</a:t>
+            </a:r>
+            <a:pPr indent="0" marL="0">
+              <a:lnSpc>
+                <a:spcPct val="135000"/>
+              </a:lnSpc>
+              <a:buNone/>
+            </a:pPr>
+            <a:r>
+              <a:rPr lang="en-US" sz="1700" dirty="0">
+                <a:solidFill>
+                  <a:srgbClr val="3A3A36"/>
+                </a:solidFill>
+              </a:rPr>
+              <a:t>": </a:t>
+            </a:r>
+            <a:pPr indent="0" marL="0">
+              <a:lnSpc>
+                <a:spcPct val="135000"/>
+              </a:lnSpc>
+              <a:buNone/>
+            </a:pPr>
+            <a:r>
+              <a:rPr lang="en-US" sz="1700" b="1" dirty="0">
+                <a:solidFill>
+                  <a:srgbClr val="262626"/>
+                </a:solidFill>
+              </a:rPr>
+              <a:t>+34 %</a:t>
+            </a:r>
+            <a:pPr indent="0" marL="0">
+              <a:lnSpc>
+                <a:spcPct val="135000"/>
+              </a:lnSpc>
+              <a:buNone/>
+            </a:pPr>
+            <a:r>
+              <a:rPr lang="en-US" sz="1700" dirty="0">
+                <a:solidFill>
+                  <a:srgbClr val="3A3A36"/>
+                </a:solidFill>
+              </a:rPr>
+              <a:t> CTR nach Creative-Refresh</a:t>
+            </a:r>
+            <a:endParaRPr lang="en-US" sz="1700" dirty="0"/>
+          </a:p>
+          <a:p>
+            <a:pPr marL="177800" indent="-177800">
+              <a:lnSpc>
+                <a:spcPct val="135000"/>
               </a:lnSpc>
               <a:buSzPct val="100000"/>
               <a:buChar char="•"/>
             </a:pPr>
             <a:r>
-              <a:rPr lang="en-US" sz="1600" dirty="0">
+              <a:rPr lang="en-US" sz="1700" dirty="0">
                 <a:solidFill>
                   <a:srgbClr val="3A3A36"/>
                 </a:solidFill>
               </a:rPr>
-              <a:t>ROAS Paid Social 4,2 bei gleichem Budget</a:t>
-            </a:r>
-            <a:endParaRPr lang="en-US" sz="1600" dirty="0"/>
-          </a:p>
-          <a:p>
-            <a:pPr marL="342900" indent="-342900">
-              <a:lnSpc>
-                <a:spcPct val="130000"/>
+              <a:t>ROAS Paid Social </a:t>
+            </a:r>
+            <a:pPr indent="0" marL="0">
+              <a:lnSpc>
+                <a:spcPct val="135000"/>
+              </a:lnSpc>
+              <a:buNone/>
+            </a:pPr>
+            <a:r>
+              <a:rPr lang="en-US" sz="1700" b="1" dirty="0">
+                <a:solidFill>
+                  <a:srgbClr val="262626"/>
+                </a:solidFill>
+              </a:rPr>
+              <a:t>4,2 </a:t>
+            </a:r>
+            <a:pPr indent="0" marL="0">
+              <a:lnSpc>
+                <a:spcPct val="135000"/>
+              </a:lnSpc>
+              <a:buNone/>
+            </a:pPr>
+            <a:r>
+              <a:rPr lang="en-US" sz="1700" dirty="0">
+                <a:solidFill>
+                  <a:srgbClr val="3A3A36"/>
+                </a:solidFill>
+              </a:rPr>
+              <a:t>bei gleichem Budget</a:t>
+            </a:r>
+            <a:endParaRPr lang="en-US" sz="1700" dirty="0"/>
+          </a:p>
+          <a:p>
+            <a:pPr marL="177800" indent="-177800">
+              <a:lnSpc>
+                <a:spcPct val="135000"/>
               </a:lnSpc>
               <a:buSzPct val="100000"/>
               <a:buChar char="•"/>
             </a:pPr>
             <a:r>
-              <a:rPr lang="en-US" sz="1600" dirty="0">
+              <a:rPr lang="en-US" sz="1700" dirty="0">
                 <a:solidFill>
                   <a:srgbClr val="3A3A36"/>
                 </a:solidFill>
               </a:rPr>
-              <a:t>Erinnerungswert von 11 % auf 19 % gestiegen</a:t>
-            </a:r>
-            <a:endParaRPr lang="en-US" sz="1600" dirty="0"/>
+              <a:t>Erinnerungswert von </a:t>
+            </a:r>
+            <a:pPr indent="0" marL="0">
+              <a:lnSpc>
+                <a:spcPct val="135000"/>
+              </a:lnSpc>
+              <a:buNone/>
+            </a:pPr>
+            <a:r>
+              <a:rPr lang="en-US" sz="1700" b="1" dirty="0">
+                <a:solidFill>
+                  <a:srgbClr val="262626"/>
+                </a:solidFill>
+              </a:rPr>
+              <a:t>11 %</a:t>
+            </a:r>
+            <a:pPr indent="0" marL="0">
+              <a:lnSpc>
+                <a:spcPct val="135000"/>
+              </a:lnSpc>
+              <a:buNone/>
+            </a:pPr>
+            <a:r>
+              <a:rPr lang="en-US" sz="1700" dirty="0">
+                <a:solidFill>
+                  <a:srgbClr val="3A3A36"/>
+                </a:solidFill>
+              </a:rPr>
+              <a:t> auf </a:t>
+            </a:r>
+            <a:pPr indent="0" marL="0">
+              <a:lnSpc>
+                <a:spcPct val="135000"/>
+              </a:lnSpc>
+              <a:buNone/>
+            </a:pPr>
+            <a:r>
+              <a:rPr lang="en-US" sz="1700" b="1" dirty="0">
+                <a:solidFill>
+                  <a:srgbClr val="262626"/>
+                </a:solidFill>
+              </a:rPr>
+              <a:t>19 %</a:t>
+            </a:r>
+            <a:pPr indent="0" marL="0">
+              <a:lnSpc>
+                <a:spcPct val="135000"/>
+              </a:lnSpc>
+              <a:buNone/>
+            </a:pPr>
+            <a:r>
+              <a:rPr lang="en-US" sz="1700" dirty="0">
+                <a:solidFill>
+                  <a:srgbClr val="3A3A36"/>
+                </a:solidFill>
+              </a:rPr>
+              <a:t> gestiegen</a:t>
+            </a:r>
+            <a:endParaRPr lang="en-US" sz="1700" dirty="0"/>
           </a:p>
         </p:txBody>
       </p:sp>
@@ -2413,8 +2837,8 @@
         </p:nvSpPr>
         <p:spPr>
           <a:xfrm>
-            <a:off x="8046720" y="320040"/>
-            <a:ext cx="6858000" cy="0"/>
+            <a:off x="7818120" y="320040"/>
+            <a:ext cx="1005840" cy="0"/>
           </a:xfrm>
           <a:prstGeom prst="rect">
             <a:avLst/>
@@ -2426,7 +2850,7 @@
           <a:bodyPr wrap="square" rtlCol="0" anchor="ctr"/>
           <a:lstStyle/>
           <a:p>
-            <a:pPr indent="0" marL="0">
+            <a:pPr algn="r" indent="0" marL="0">
               <a:buNone/>
             </a:pPr>
             <a:r>
@@ -2435,7 +2859,7 @@
                   <a:srgbClr val="8A897F"/>
                 </a:solidFill>
               </a:rPr>
-              <a:t>05</a:t>
+              <a:t>05 / 06</a:t>
             </a:r>
             <a:endParaRPr lang="en-US" sz="1100" dirty="0"/>
           </a:p>
@@ -2449,8 +2873,8 @@
         </p:nvSpPr>
         <p:spPr>
           <a:xfrm>
-            <a:off x="548640" y="457200"/>
-            <a:ext cx="7315200" cy="0"/>
+            <a:off x="548640" y="384048"/>
+            <a:ext cx="6858000" cy="0"/>
           </a:xfrm>
           <a:prstGeom prst="rect">
             <a:avLst/>
@@ -2466,14 +2890,14 @@
               <a:buNone/>
             </a:pPr>
             <a:r>
-              <a:rPr lang="en-US" sz="2800" b="1" dirty="0">
-                <a:solidFill>
-                  <a:srgbClr val="262626"/>
-                </a:solidFill>
-              </a:rPr>
-              <a:t>Wer das macht</a:t>
-            </a:r>
-            <a:endParaRPr lang="en-US" sz="2800" dirty="0"/>
+              <a:rPr lang="en-US" sz="950" spc="250" kern="0" dirty="0">
+                <a:solidFill>
+                  <a:srgbClr val="8A897F"/>
+                </a:solidFill>
+              </a:rPr>
+              <a:t>PILOT · MUSTERMARKE</a:t>
+            </a:r>
+            <a:endParaRPr lang="en-US" sz="950" dirty="0"/>
           </a:p>
         </p:txBody>
       </p:sp>
@@ -2485,8 +2909,8 @@
         </p:nvSpPr>
         <p:spPr>
           <a:xfrm>
-            <a:off x="640080" y="1371600"/>
-            <a:ext cx="7498080" cy="3108960"/>
+            <a:off x="548640" y="713232"/>
+            <a:ext cx="7315200" cy="0"/>
           </a:xfrm>
           <a:prstGeom prst="rect">
             <a:avLst/>
@@ -2498,58 +2922,94 @@
           <a:bodyPr wrap="square" rtlCol="0" anchor="ctr"/>
           <a:lstStyle/>
           <a:p>
-            <a:pPr marL="342900" indent="-342900">
-              <a:lnSpc>
-                <a:spcPct val="130000"/>
+            <a:pPr indent="0" marL="0">
+              <a:buNone/>
+            </a:pPr>
+            <a:r>
+              <a:rPr lang="en-US" sz="2800" b="1" dirty="0">
+                <a:solidFill>
+                  <a:srgbClr val="262626"/>
+                </a:solidFill>
+              </a:rPr>
+              <a:t>Wer das macht</a:t>
+            </a:r>
+            <a:endParaRPr lang="en-US" sz="2800" dirty="0"/>
+          </a:p>
+        </p:txBody>
+      </p:sp>
+      <p:sp>
+        <p:nvSpPr>
+          <p:cNvPr id="6" name="Text 4"/>
+          <p:cNvSpPr/>
+          <p:nvPr/>
+        </p:nvSpPr>
+        <p:spPr>
+          <a:xfrm>
+            <a:off x="640080" y="1645920"/>
+            <a:ext cx="7680960" cy="2926080"/>
+          </a:xfrm>
+          <a:prstGeom prst="rect">
+            <a:avLst/>
+          </a:prstGeom>
+          <a:noFill/>
+          <a:ln/>
+        </p:spPr>
+        <p:txBody>
+          <a:bodyPr wrap="square" rtlCol="0" anchor="ctr"/>
+          <a:lstStyle/>
+          <a:p>
+            <a:pPr marL="177800" indent="-177800">
+              <a:lnSpc>
+                <a:spcPct val="135000"/>
               </a:lnSpc>
               <a:buSzPct val="100000"/>
               <a:buChar char="•"/>
             </a:pPr>
             <a:r>
-              <a:rPr lang="en-US" sz="1600" dirty="0">
+              <a:rPr lang="en-US" sz="1700" dirty="0">
                 <a:solidFill>
                   <a:srgbClr val="3A3A36"/>
                 </a:solidFill>
               </a:rPr>
               <a:t>Strategie: pilot Hamburg, Team Mustermarke</a:t>
             </a:r>
-            <a:endParaRPr lang="en-US" sz="1600" dirty="0"/>
-          </a:p>
-          <a:p>
-            <a:pPr marL="342900" indent="-342900">
-              <a:lnSpc>
-                <a:spcPct val="130000"/>
+            <a:endParaRPr lang="en-US" sz="1700" dirty="0"/>
+          </a:p>
+          <a:p>
+            <a:pPr marL="177800" indent="-177800">
+              <a:lnSpc>
+                <a:spcPct val="135000"/>
               </a:lnSpc>
               <a:buSzPct val="100000"/>
               <a:buChar char="•"/>
             </a:pPr>
             <a:r>
-              <a:rPr lang="en-US" sz="1600" dirty="0">
+              <a:rPr lang="en-US" sz="1700" dirty="0">
                 <a:solidFill>
                   <a:srgbClr val="3A3A36"/>
                 </a:solidFill>
               </a:rPr>
               <a:t>Kreation &amp; Media aus einer Hand</a:t>
             </a:r>
-            <a:endParaRPr lang="en-US" sz="1600" dirty="0"/>
-          </a:p>
-          <a:p>
-            <a:pPr marL="342900" indent="-342900">
-              <a:lnSpc>
-                <a:spcPct val="130000"/>
+            <a:endParaRPr lang="en-US" sz="1700" dirty="0"/>
+          </a:p>
+          <a:p>
+            <a:pPr marL="177800" indent="-177800">
+              <a:lnSpc>
+                <a:spcPct val="135000"/>
               </a:lnSpc>
               <a:buSzPct val="100000"/>
               <a:buChar char="•"/>
             </a:pPr>
             <a:r>
-              <a:rPr lang="en-US" sz="1600" dirty="0">
+              <a:rPr lang="en-US" sz="1700" dirty="0">
                 <a:solidFill>
                   <a:srgbClr val="3A3A36"/>
                 </a:solidFill>
               </a:rPr>
               <a:t>Feste Ansprechpartnerin über die gesamte Laufzeit</a:t>
             </a:r>
-            <a:endParaRPr lang="en-US" sz="1600" dirty="0"/>
+            <a:endParaRPr lang="en-US" sz="1700" dirty="0"/>
           </a:p>
         </p:txBody>
       </p:sp>
@@ -2567,7 +3027,7 @@
     <p:bg>
       <p:bgPr>
         <a:solidFill>
-          <a:srgbClr val="FCFCFC"/>
+          <a:srgbClr val="262626"/>
         </a:solidFill>
       </p:bgPr>
     </p:bg>
@@ -2613,8 +3073,8 @@
         </p:nvSpPr>
         <p:spPr>
           <a:xfrm>
-            <a:off x="8046720" y="320040"/>
-            <a:ext cx="6858000" cy="0"/>
+            <a:off x="7818120" y="320040"/>
+            <a:ext cx="1005840" cy="0"/>
           </a:xfrm>
           <a:prstGeom prst="rect">
             <a:avLst/>
@@ -2626,7 +3086,7 @@
           <a:bodyPr wrap="square" rtlCol="0" anchor="ctr"/>
           <a:lstStyle/>
           <a:p>
-            <a:pPr indent="0" marL="0">
+            <a:pPr algn="r" indent="0" marL="0">
               <a:buNone/>
             </a:pPr>
             <a:r>
@@ -2635,7 +3095,7 @@
                   <a:srgbClr val="8A897F"/>
                 </a:solidFill>
               </a:rPr>
-              <a:t>06</a:t>
+              <a:t>06 / 06</a:t>
             </a:r>
             <a:endParaRPr lang="en-US" sz="1100" dirty="0"/>
           </a:p>
@@ -2649,8 +3109,8 @@
         </p:nvSpPr>
         <p:spPr>
           <a:xfrm>
-            <a:off x="548640" y="457200"/>
-            <a:ext cx="7315200" cy="0"/>
+            <a:off x="548640" y="384048"/>
+            <a:ext cx="6858000" cy="0"/>
           </a:xfrm>
           <a:prstGeom prst="rect">
             <a:avLst/>
@@ -2666,14 +3126,14 @@
               <a:buNone/>
             </a:pPr>
             <a:r>
-              <a:rPr lang="en-US" sz="2800" b="1" dirty="0">
-                <a:solidFill>
-                  <a:srgbClr val="262626"/>
-                </a:solidFill>
-              </a:rPr>
-              <a:t>Nächste Schritte</a:t>
-            </a:r>
-            <a:endParaRPr lang="en-US" sz="2800" dirty="0"/>
+              <a:rPr lang="en-US" sz="950" spc="250" kern="0" dirty="0">
+                <a:solidFill>
+                  <a:srgbClr val="FFE05E"/>
+                </a:solidFill>
+              </a:rPr>
+              <a:t>PILOT · MUSTERMARKE</a:t>
+            </a:r>
+            <a:endParaRPr lang="en-US" sz="950" dirty="0"/>
           </a:p>
         </p:txBody>
       </p:sp>
@@ -2685,8 +3145,8 @@
         </p:nvSpPr>
         <p:spPr>
           <a:xfrm>
-            <a:off x="640080" y="1371600"/>
-            <a:ext cx="7498080" cy="3108960"/>
+            <a:off x="548640" y="713232"/>
+            <a:ext cx="7315200" cy="0"/>
           </a:xfrm>
           <a:prstGeom prst="rect">
             <a:avLst/>
@@ -2698,58 +3158,192 @@
           <a:bodyPr wrap="square" rtlCol="0" anchor="ctr"/>
           <a:lstStyle/>
           <a:p>
-            <a:pPr marL="342900" indent="-342900">
-              <a:lnSpc>
-                <a:spcPct val="130000"/>
+            <a:pPr indent="0" marL="0">
+              <a:buNone/>
+            </a:pPr>
+            <a:r>
+              <a:rPr lang="en-US" sz="2800" b="1" dirty="0">
+                <a:solidFill>
+                  <a:srgbClr val="FCFCFC"/>
+                </a:solidFill>
+              </a:rPr>
+              <a:t>Nächste Schritte</a:t>
+            </a:r>
+            <a:endParaRPr lang="en-US" sz="2800" dirty="0"/>
+          </a:p>
+        </p:txBody>
+      </p:sp>
+      <p:sp>
+        <p:nvSpPr>
+          <p:cNvPr id="6" name="Text 4"/>
+          <p:cNvSpPr/>
+          <p:nvPr/>
+        </p:nvSpPr>
+        <p:spPr>
+          <a:xfrm>
+            <a:off x="640080" y="1645920"/>
+            <a:ext cx="7680960" cy="2926080"/>
+          </a:xfrm>
+          <a:prstGeom prst="rect">
+            <a:avLst/>
+          </a:prstGeom>
+          <a:noFill/>
+          <a:ln/>
+        </p:spPr>
+        <p:txBody>
+          <a:bodyPr wrap="square" rtlCol="0" anchor="ctr"/>
+          <a:lstStyle/>
+          <a:p>
+            <a:pPr marL="177800" indent="-177800">
+              <a:lnSpc>
+                <a:spcPct val="135000"/>
               </a:lnSpc>
               <a:buSzPct val="100000"/>
               <a:buChar char="•"/>
             </a:pPr>
             <a:r>
-              <a:rPr lang="en-US" sz="1600" dirty="0">
-                <a:solidFill>
-                  <a:srgbClr val="3A3A36"/>
-                </a:solidFill>
-              </a:rPr>
-              <a:t>Kick-off-Workshop in KW 34</a:t>
-            </a:r>
-            <a:endParaRPr lang="en-US" sz="1600" dirty="0"/>
-          </a:p>
-          <a:p>
-            <a:pPr marL="342900" indent="-342900">
-              <a:lnSpc>
-                <a:spcPct val="130000"/>
+              <a:rPr lang="en-US" sz="1700" dirty="0">
+                <a:solidFill>
+                  <a:srgbClr val="D8D8D2"/>
+                </a:solidFill>
+              </a:rPr>
+              <a:t>Kick-off-Workshop in KW </a:t>
+            </a:r>
+            <a:pPr indent="0" marL="0">
+              <a:lnSpc>
+                <a:spcPct val="135000"/>
+              </a:lnSpc>
+              <a:buNone/>
+            </a:pPr>
+            <a:r>
+              <a:rPr lang="en-US" sz="1700" b="1" dirty="0">
+                <a:solidFill>
+                  <a:srgbClr val="FFE05E"/>
+                </a:solidFill>
+              </a:rPr>
+              <a:t>34</a:t>
+            </a:r>
+            <a:endParaRPr lang="en-US" sz="1700" dirty="0"/>
+          </a:p>
+          <a:p>
+            <a:pPr marL="177800" indent="-177800">
+              <a:lnSpc>
+                <a:spcPct val="135000"/>
               </a:lnSpc>
               <a:buSzPct val="100000"/>
               <a:buChar char="•"/>
             </a:pPr>
             <a:r>
-              <a:rPr lang="en-US" sz="1600" dirty="0">
-                <a:solidFill>
-                  <a:srgbClr val="3A3A36"/>
-                </a:solidFill>
-              </a:rPr>
-              <a:t>Kreativ-Briefing bis 15.08.</a:t>
-            </a:r>
-            <a:endParaRPr lang="en-US" sz="1600" dirty="0"/>
-          </a:p>
-          <a:p>
-            <a:pPr marL="342900" indent="-342900">
-              <a:lnSpc>
-                <a:spcPct val="130000"/>
+              <a:rPr lang="en-US" sz="1700" dirty="0">
+                <a:solidFill>
+                  <a:srgbClr val="D8D8D2"/>
+                </a:solidFill>
+              </a:rPr>
+              <a:t>Kreativ-Briefing bis </a:t>
+            </a:r>
+            <a:pPr indent="0" marL="0">
+              <a:lnSpc>
+                <a:spcPct val="135000"/>
+              </a:lnSpc>
+              <a:buNone/>
+            </a:pPr>
+            <a:r>
+              <a:rPr lang="en-US" sz="1700" b="1" dirty="0">
+                <a:solidFill>
+                  <a:srgbClr val="FFE05E"/>
+                </a:solidFill>
+              </a:rPr>
+              <a:t>15.08.</a:t>
+            </a:r>
+            <a:endParaRPr lang="en-US" sz="1700" dirty="0"/>
+          </a:p>
+          <a:p>
+            <a:pPr marL="177800" indent="-177800">
+              <a:lnSpc>
+                <a:spcPct val="135000"/>
               </a:lnSpc>
               <a:buSzPct val="100000"/>
               <a:buChar char="•"/>
             </a:pPr>
             <a:r>
-              <a:rPr lang="en-US" sz="1600" dirty="0">
-                <a:solidFill>
-                  <a:srgbClr val="3A3A36"/>
-                </a:solidFill>
-              </a:rPr>
-              <a:t>Mediaplan v1 bis 22.08., Go-Live 01.09.</a:t>
-            </a:r>
-            <a:endParaRPr lang="en-US" sz="1600" dirty="0"/>
+              <a:rPr lang="en-US" sz="1700" dirty="0">
+                <a:solidFill>
+                  <a:srgbClr val="D8D8D2"/>
+                </a:solidFill>
+              </a:rPr>
+              <a:t>Mediaplan v</a:t>
+            </a:r>
+            <a:pPr indent="0" marL="0">
+              <a:lnSpc>
+                <a:spcPct val="135000"/>
+              </a:lnSpc>
+              <a:buNone/>
+            </a:pPr>
+            <a:r>
+              <a:rPr lang="en-US" sz="1700" b="1" dirty="0">
+                <a:solidFill>
+                  <a:srgbClr val="FFE05E"/>
+                </a:solidFill>
+              </a:rPr>
+              <a:t>1 </a:t>
+            </a:r>
+            <a:pPr indent="0" marL="0">
+              <a:lnSpc>
+                <a:spcPct val="135000"/>
+              </a:lnSpc>
+              <a:buNone/>
+            </a:pPr>
+            <a:r>
+              <a:rPr lang="en-US" sz="1700" dirty="0">
+                <a:solidFill>
+                  <a:srgbClr val="D8D8D2"/>
+                </a:solidFill>
+              </a:rPr>
+              <a:t>bis </a:t>
+            </a:r>
+            <a:pPr indent="0" marL="0">
+              <a:lnSpc>
+                <a:spcPct val="135000"/>
+              </a:lnSpc>
+              <a:buNone/>
+            </a:pPr>
+            <a:r>
+              <a:rPr lang="en-US" sz="1700" b="1" dirty="0">
+                <a:solidFill>
+                  <a:srgbClr val="FFE05E"/>
+                </a:solidFill>
+              </a:rPr>
+              <a:t>22.08., </a:t>
+            </a:r>
+            <a:pPr indent="0" marL="0">
+              <a:lnSpc>
+                <a:spcPct val="135000"/>
+              </a:lnSpc>
+              <a:buNone/>
+            </a:pPr>
+            <a:r>
+              <a:rPr lang="en-US" sz="1700" dirty="0">
+                <a:solidFill>
+                  <a:srgbClr val="D8D8D2"/>
+                </a:solidFill>
+              </a:rPr>
+              <a:t>Go-Live </a:t>
+            </a:r>
+            <a:pPr indent="0" marL="0">
+              <a:lnSpc>
+                <a:spcPct val="135000"/>
+              </a:lnSpc>
+              <a:buNone/>
+            </a:pPr>
+            <a:r>
+              <a:rPr lang="en-US" sz="1700" b="1" dirty="0">
+                <a:solidFill>
+                  <a:srgbClr val="FFE05E"/>
+                </a:solidFill>
+              </a:rPr>
+              <a:t>01.09.</a:t>
+            </a:r>
+            <a:endParaRPr lang="en-US" sz="1700" dirty="0"/>
           </a:p>
         </p:txBody>
       </p:sp>
